--- a/Lectures/UncertaintyQuantification .pptx
+++ b/Lectures/UncertaintyQuantification .pptx
@@ -271,7 +271,7 @@
       <p15:sldGuideLst xmlns:p15="http://schemas.microsoft.com/office/powerpoint/2012/main"/>
     </p:ext>
     <p:ext uri="http://customooxmlschemas.google.com/">
-      <go:slidesCustomData xmlns="" xmlns:mc="http://schemas.openxmlformats.org/markup-compatibility/2006" xmlns:mv="urn:schemas-microsoft-com:mac:vml" xmlns:c="http://schemas.openxmlformats.org/drawingml/2006/chart" xmlns:dgm="http://schemas.openxmlformats.org/drawingml/2006/diagram" xmlns:o="urn:schemas-microsoft-com:office:office" xmlns:v="urn:schemas-microsoft-com:vml" xmlns:pvml="urn:schemas-microsoft-com:office:powerpoint" xmlns:com="http://schemas.openxmlformats.org/drawingml/2006/compatibility" xmlns:p14="http://schemas.microsoft.com/office/powerpoint/2010/main" xmlns:p15="http://schemas.microsoft.com/office/powerpoint/2012/main" xmlns:go="http://customooxmlschemas.google.com/" r:id="rId49" roundtripDataSignature="AMtx7mgWqGpmJnm2LhSO/E7EgiMMs26KqA=="/>
+      <go:slidesCustomData xmlns:go="http://customooxmlschemas.google.com/" xmlns:p15="http://schemas.microsoft.com/office/powerpoint/2012/main" xmlns:p14="http://schemas.microsoft.com/office/powerpoint/2010/main" xmlns:com="http://schemas.openxmlformats.org/drawingml/2006/compatibility" xmlns:pvml="urn:schemas-microsoft-com:office:powerpoint" xmlns:v="urn:schemas-microsoft-com:vml" xmlns:o="urn:schemas-microsoft-com:office:office" xmlns:dgm="http://schemas.openxmlformats.org/drawingml/2006/diagram" xmlns:c="http://schemas.openxmlformats.org/drawingml/2006/chart" xmlns:mv="urn:schemas-microsoft-com:mac:vml" xmlns:mc="http://schemas.openxmlformats.org/markup-compatibility/2006" xmlns="" r:id="rId49" roundtripDataSignature="AMtx7mgWqGpmJnm2LhSO/E7EgiMMs26KqA=="/>
     </p:ext>
   </p:extLst>
 </p:presentation>
@@ -14574,7 +14574,7 @@
         </p:nvSpPr>
         <p:spPr>
           <a:xfrm>
-            <a:off x="415600" y="1151400"/>
+            <a:off x="415600" y="912861"/>
             <a:ext cx="11360700" cy="4555200"/>
           </a:xfrm>
         </p:spPr>
@@ -14609,6 +14609,15 @@
             <a:endParaRPr lang="en-US" dirty="0"/>
           </a:p>
           <a:p>
+            <a:r>
+              <a:rPr lang="en-US" dirty="0">
+                <a:hlinkClick r:id="rId5"/>
+              </a:rPr>
+              <a:t>https://www.afit.edu/STAT/statcoe_files/4_0328_LazarusUQBP_2_2.pdf</a:t>
+            </a:r>
+            <a:endParaRPr lang="en-US" dirty="0"/>
+          </a:p>
+          <a:p>
             <a:pPr marL="76200" indent="0">
               <a:buNone/>
             </a:pPr>
@@ -14617,7 +14626,7 @@
           <a:p>
             <a:r>
               <a:rPr lang="en-US" dirty="0">
-                <a:hlinkClick r:id="rId5"/>
+                <a:hlinkClick r:id="rId6"/>
               </a:rPr>
               <a:t>https://arxiv.org/pdf/1910.09457</a:t>
             </a:r>
@@ -14630,7 +14639,7 @@
             </a:r>
             <a:r>
               <a:rPr lang="en-US" dirty="0">
-                <a:hlinkClick r:id="rId6"/>
+                <a:hlinkClick r:id="rId7"/>
               </a:rPr>
               <a:t>https://sites.google.com/view/uncertainty-nlp</a:t>
             </a:r>
